--- a/examples/repositories/slidepoise-showcase/deck.pptx
+++ b/examples/repositories/slidepoise-showcase/deck.pptx
@@ -507,7 +507,7 @@
               <a:t>仮想の地域ワークショップ予約サイトの設計案。操作数・完了率・時間は仮想設定と目標であり、実測ではありません。
 画面例の会場名と120分も架空の設定です。
 [SlidePoise sources]
-Generated target visual: M:\Codex\Projects\awesome-codex-ppt-skills-ja\examples\repositories\slidepoise-showcase\slides\reduce-steps\work\accepted-slide.png</a:t>
+Generated target visual: M:\Codex\Projects\studio-yebisu\workspace\slides\examples\repositories\slidepoise-showcase\slides\reduce-steps\work\accepted-slide.png</a:t>
             </a:r>
             <a:endParaRPr lang="en-US" dirty="0"/>
           </a:p>
@@ -689,7 +689,7 @@
               <a:t>仮想の地域ワークショップ予約サイトの設計案。操作数・完了率・時間は仮想設定と目標であり、実測ではありません。
 画面例の会場名と120分も架空の設定です。
 [SlidePoise sources]
-Generated target visual: M:\Codex\Projects\awesome-codex-ppt-skills-ja\examples\repositories\slidepoise-showcase\slides\targets-and-order\work\accepted-slide.png</a:t>
+Generated target visual: M:\Codex\Projects\studio-yebisu\workspace\slides\examples\repositories\slidepoise-showcase\slides\targets-and-order\work\accepted-slide.png</a:t>
             </a:r>
             <a:endParaRPr lang="en-US" dirty="0"/>
           </a:p>
@@ -1129,7 +1129,7 @@
         <p:spPr>
           <a:xfrm>
             <a:off x="2057400" y="2827020"/>
-            <a:ext cx="1234440" cy="815340"/>
+            <a:ext cx="1371600" cy="815340"/>
           </a:xfrm>
           <a:custGeom>
             <a:avLst/>
@@ -1138,18 +1138,18 @@
             <a:cxnLst/>
             <a:rect l="l" t="t" r="r" b="b"/>
             <a:pathLst>
-              <a:path w="1234440" h="815340">
+              <a:path w="1371600" h="815340">
                 <a:moveTo>
                   <a:pt x="-2210" y="686"/>
                 </a:moveTo>
                 <a:lnTo>
-                  <a:pt x="981685" y="686"/>
-                </a:lnTo>
-                <a:lnTo>
-                  <a:pt x="1229487" y="408813"/>
-                </a:lnTo>
-                <a:lnTo>
-                  <a:pt x="981685" y="816940"/>
+                  <a:pt x="1186510" y="686"/>
+                </a:lnTo>
+                <a:lnTo>
+                  <a:pt x="1369390" y="408813"/>
+                </a:lnTo>
+                <a:lnTo>
+                  <a:pt x="1186510" y="816940"/>
                 </a:lnTo>
                 <a:lnTo>
                   <a:pt x="-2210" y="816940"/>
@@ -1179,8 +1179,8 @@
         </p:nvSpPr>
         <p:spPr>
           <a:xfrm>
-            <a:off x="3147060" y="2827020"/>
-            <a:ext cx="1394460" cy="815340"/>
+            <a:off x="3246120" y="2827020"/>
+            <a:ext cx="1371600" cy="815340"/>
           </a:xfrm>
           <a:custGeom>
             <a:avLst/>
@@ -1189,24 +1189,24 @@
             <a:cxnLst/>
             <a:rect l="l" t="t" r="r" b="b"/>
             <a:pathLst>
-              <a:path w="1394460" h="815340">
+              <a:path w="1371600" h="815340">
                 <a:moveTo>
-                  <a:pt x="1372" y="686"/>
+                  <a:pt x="-2210" y="686"/>
                 </a:moveTo>
                 <a:lnTo>
-                  <a:pt x="1145591" y="686"/>
-                </a:lnTo>
-                <a:lnTo>
-                  <a:pt x="1393393" y="408813"/>
-                </a:lnTo>
-                <a:lnTo>
-                  <a:pt x="1145591" y="816940"/>
-                </a:lnTo>
-                <a:lnTo>
-                  <a:pt x="1372" y="816940"/>
-                </a:lnTo>
-                <a:lnTo>
-                  <a:pt x="249174" y="408813"/>
+                  <a:pt x="1186510" y="686"/>
+                </a:lnTo>
+                <a:lnTo>
+                  <a:pt x="1369390" y="408813"/>
+                </a:lnTo>
+                <a:lnTo>
+                  <a:pt x="1186510" y="816940"/>
+                </a:lnTo>
+                <a:lnTo>
+                  <a:pt x="-2210" y="816940"/>
+                </a:lnTo>
+                <a:lnTo>
+                  <a:pt x="180670" y="408813"/>
                 </a:lnTo>
                 <a:close/>
               </a:path>
@@ -1233,8 +1233,8 @@
         </p:nvSpPr>
         <p:spPr>
           <a:xfrm>
-            <a:off x="4282440" y="2827020"/>
-            <a:ext cx="1394460" cy="815340"/>
+            <a:off x="4434840" y="2827020"/>
+            <a:ext cx="1371600" cy="815340"/>
           </a:xfrm>
           <a:custGeom>
             <a:avLst/>
@@ -1243,24 +1243,24 @@
             <a:cxnLst/>
             <a:rect l="l" t="t" r="r" b="b"/>
             <a:pathLst>
-              <a:path w="1394460" h="815340">
+              <a:path w="1371600" h="815340">
                 <a:moveTo>
-                  <a:pt x="2896" y="686"/>
+                  <a:pt x="-2210" y="686"/>
                 </a:moveTo>
                 <a:lnTo>
-                  <a:pt x="1147115" y="686"/>
-                </a:lnTo>
-                <a:lnTo>
-                  <a:pt x="1394917" y="408813"/>
-                </a:lnTo>
-                <a:lnTo>
-                  <a:pt x="1147115" y="816940"/>
-                </a:lnTo>
-                <a:lnTo>
-                  <a:pt x="2896" y="816940"/>
-                </a:lnTo>
-                <a:lnTo>
-                  <a:pt x="250698" y="408813"/>
+                  <a:pt x="1186510" y="686"/>
+                </a:lnTo>
+                <a:lnTo>
+                  <a:pt x="1369390" y="408813"/>
+                </a:lnTo>
+                <a:lnTo>
+                  <a:pt x="1186510" y="816940"/>
+                </a:lnTo>
+                <a:lnTo>
+                  <a:pt x="-2210" y="816940"/>
+                </a:lnTo>
+                <a:lnTo>
+                  <a:pt x="180670" y="408813"/>
                 </a:lnTo>
                 <a:close/>
               </a:path>
@@ -1287,8 +1287,8 @@
         </p:nvSpPr>
         <p:spPr>
           <a:xfrm>
-            <a:off x="5440680" y="2827020"/>
-            <a:ext cx="1363980" cy="815340"/>
+            <a:off x="5623560" y="2827020"/>
+            <a:ext cx="1371600" cy="815340"/>
           </a:xfrm>
           <a:custGeom>
             <a:avLst/>
@@ -1297,24 +1297,24 @@
             <a:cxnLst/>
             <a:rect l="l" t="t" r="r" b="b"/>
             <a:pathLst>
-              <a:path w="1363980" h="815340">
+              <a:path w="1371600" h="815340">
                 <a:moveTo>
-                  <a:pt x="-3810" y="686"/>
+                  <a:pt x="-2210" y="686"/>
                 </a:moveTo>
                 <a:lnTo>
-                  <a:pt x="1111225" y="686"/>
-                </a:lnTo>
-                <a:lnTo>
-                  <a:pt x="1359027" y="408813"/>
-                </a:lnTo>
-                <a:lnTo>
-                  <a:pt x="1111225" y="816940"/>
-                </a:lnTo>
-                <a:lnTo>
-                  <a:pt x="-3810" y="816940"/>
-                </a:lnTo>
-                <a:lnTo>
-                  <a:pt x="243916" y="408813"/>
+                  <a:pt x="1186510" y="686"/>
+                </a:lnTo>
+                <a:lnTo>
+                  <a:pt x="1369390" y="408813"/>
+                </a:lnTo>
+                <a:lnTo>
+                  <a:pt x="1186510" y="816940"/>
+                </a:lnTo>
+                <a:lnTo>
+                  <a:pt x="-2210" y="816940"/>
+                </a:lnTo>
+                <a:lnTo>
+                  <a:pt x="180670" y="408813"/>
                 </a:lnTo>
                 <a:close/>
               </a:path>
@@ -1341,8 +1341,8 @@
         </p:nvSpPr>
         <p:spPr>
           <a:xfrm>
-            <a:off x="6591300" y="2827020"/>
-            <a:ext cx="1524000" cy="815340"/>
+            <a:off x="6812280" y="2827020"/>
+            <a:ext cx="1371600" cy="815340"/>
           </a:xfrm>
           <a:custGeom>
             <a:avLst/>
@@ -1351,24 +1351,24 @@
             <a:cxnLst/>
             <a:rect l="l" t="t" r="r" b="b"/>
             <a:pathLst>
-              <a:path w="1524000" h="815340">
+              <a:path w="1371600" h="815340">
                 <a:moveTo>
-                  <a:pt x="-2972" y="686"/>
+                  <a:pt x="-2210" y="686"/>
                 </a:moveTo>
                 <a:lnTo>
-                  <a:pt x="1272464" y="686"/>
-                </a:lnTo>
-                <a:lnTo>
-                  <a:pt x="1520266" y="408813"/>
-                </a:lnTo>
-                <a:lnTo>
-                  <a:pt x="1272464" y="816940"/>
-                </a:lnTo>
-                <a:lnTo>
-                  <a:pt x="-2972" y="816940"/>
-                </a:lnTo>
-                <a:lnTo>
-                  <a:pt x="244831" y="408813"/>
+                  <a:pt x="1186510" y="686"/>
+                </a:lnTo>
+                <a:lnTo>
+                  <a:pt x="1369390" y="408813"/>
+                </a:lnTo>
+                <a:lnTo>
+                  <a:pt x="1186510" y="816940"/>
+                </a:lnTo>
+                <a:lnTo>
+                  <a:pt x="-2210" y="816940"/>
+                </a:lnTo>
+                <a:lnTo>
+                  <a:pt x="180670" y="408813"/>
                 </a:lnTo>
                 <a:close/>
               </a:path>
@@ -1395,8 +1395,8 @@
         </p:nvSpPr>
         <p:spPr>
           <a:xfrm>
-            <a:off x="8008620" y="2827020"/>
-            <a:ext cx="1440180" cy="815340"/>
+            <a:off x="8001000" y="2827020"/>
+            <a:ext cx="1371600" cy="815340"/>
           </a:xfrm>
           <a:custGeom>
             <a:avLst/>
@@ -1405,24 +1405,24 @@
             <a:cxnLst/>
             <a:rect l="l" t="t" r="r" b="b"/>
             <a:pathLst>
-              <a:path w="1440180" h="815340">
+              <a:path w="1371600" h="815340">
                 <a:moveTo>
-                  <a:pt x="914" y="686"/>
+                  <a:pt x="-2210" y="686"/>
                 </a:moveTo>
                 <a:lnTo>
-                  <a:pt x="1196111" y="686"/>
-                </a:lnTo>
-                <a:lnTo>
-                  <a:pt x="1443914" y="408813"/>
-                </a:lnTo>
-                <a:lnTo>
-                  <a:pt x="1196111" y="816940"/>
-                </a:lnTo>
-                <a:lnTo>
-                  <a:pt x="914" y="816940"/>
-                </a:lnTo>
-                <a:lnTo>
-                  <a:pt x="248641" y="408813"/>
+                  <a:pt x="1186510" y="686"/>
+                </a:lnTo>
+                <a:lnTo>
+                  <a:pt x="1369390" y="408813"/>
+                </a:lnTo>
+                <a:lnTo>
+                  <a:pt x="1186510" y="816940"/>
+                </a:lnTo>
+                <a:lnTo>
+                  <a:pt x="-2210" y="816940"/>
+                </a:lnTo>
+                <a:lnTo>
+                  <a:pt x="180670" y="408813"/>
                 </a:lnTo>
                 <a:close/>
               </a:path>
@@ -1449,8 +1449,8 @@
         </p:nvSpPr>
         <p:spPr>
           <a:xfrm>
-            <a:off x="9273540" y="2827020"/>
-            <a:ext cx="1341120" cy="815340"/>
+            <a:off x="9189720" y="2827020"/>
+            <a:ext cx="1371600" cy="815340"/>
           </a:xfrm>
           <a:custGeom>
             <a:avLst/>
@@ -1459,24 +1459,24 @@
             <a:cxnLst/>
             <a:rect l="l" t="t" r="r" b="b"/>
             <a:pathLst>
-              <a:path w="1341120" h="815340">
+              <a:path w="1371600" h="815340">
                 <a:moveTo>
-                  <a:pt x="-3200" y="686"/>
+                  <a:pt x="-2210" y="686"/>
                 </a:moveTo>
                 <a:lnTo>
-                  <a:pt x="1089965" y="686"/>
-                </a:lnTo>
-                <a:lnTo>
-                  <a:pt x="1337767" y="408813"/>
-                </a:lnTo>
-                <a:lnTo>
-                  <a:pt x="1089965" y="816940"/>
-                </a:lnTo>
-                <a:lnTo>
-                  <a:pt x="-3200" y="816940"/>
-                </a:lnTo>
-                <a:lnTo>
-                  <a:pt x="244602" y="408813"/>
+                  <a:pt x="1186510" y="686"/>
+                </a:lnTo>
+                <a:lnTo>
+                  <a:pt x="1369390" y="408813"/>
+                </a:lnTo>
+                <a:lnTo>
+                  <a:pt x="1186510" y="816940"/>
+                </a:lnTo>
+                <a:lnTo>
+                  <a:pt x="-2210" y="816940"/>
+                </a:lnTo>
+                <a:lnTo>
+                  <a:pt x="180670" y="408813"/>
                 </a:lnTo>
                 <a:close/>
               </a:path>
@@ -1503,8 +1503,8 @@
         </p:nvSpPr>
         <p:spPr>
           <a:xfrm>
-            <a:off x="10500360" y="2827020"/>
-            <a:ext cx="1363980" cy="815340"/>
+            <a:off x="10378440" y="2827020"/>
+            <a:ext cx="1371600" cy="815340"/>
           </a:xfrm>
           <a:custGeom>
             <a:avLst/>
@@ -1513,24 +1513,24 @@
             <a:cxnLst/>
             <a:rect l="l" t="t" r="r" b="b"/>
             <a:pathLst>
-              <a:path w="1363980" h="815340">
+              <a:path w="1371600" h="815340">
                 <a:moveTo>
-                  <a:pt x="1600" y="686"/>
+                  <a:pt x="-2210" y="686"/>
                 </a:moveTo>
                 <a:lnTo>
-                  <a:pt x="1116711" y="686"/>
-                </a:lnTo>
-                <a:lnTo>
-                  <a:pt x="1364513" y="408813"/>
-                </a:lnTo>
-                <a:lnTo>
-                  <a:pt x="1116711" y="816940"/>
-                </a:lnTo>
-                <a:lnTo>
-                  <a:pt x="1600" y="816940"/>
-                </a:lnTo>
-                <a:lnTo>
-                  <a:pt x="249403" y="408813"/>
+                  <a:pt x="1186510" y="686"/>
+                </a:lnTo>
+                <a:lnTo>
+                  <a:pt x="1369390" y="408813"/>
+                </a:lnTo>
+                <a:lnTo>
+                  <a:pt x="1186510" y="816940"/>
+                </a:lnTo>
+                <a:lnTo>
+                  <a:pt x="-2210" y="816940"/>
+                </a:lnTo>
+                <a:lnTo>
+                  <a:pt x="180670" y="408813"/>
                 </a:lnTo>
                 <a:close/>
               </a:path>
@@ -2085,8 +2085,8 @@
         </p:nvSpPr>
         <p:spPr>
           <a:xfrm>
-            <a:off x="2247900" y="3040380"/>
-            <a:ext cx="822960" cy="419100"/>
+            <a:off x="2171700" y="3040380"/>
+            <a:ext cx="960120" cy="419100"/>
           </a:xfrm>
           <a:prstGeom prst="rect">
             <a:avLst/>
@@ -2108,7 +2108,7 @@
               <a:defRPr spc="0"/>
             </a:pPr>
             <a:r>
-              <a:rPr lang="en-US" sz="2000" b="1" dirty="0" spc="0">
+              <a:rPr lang="en-US" sz="1750" b="1" dirty="0" spc="0">
                 <a:solidFill>
                   <a:srgbClr val="112132"/>
                 </a:solidFill>
@@ -2118,7 +2118,7 @@
               </a:rPr>
               <a:t>一覧</a:t>
             </a:r>
-            <a:endParaRPr lang="en-US" sz="2000" dirty="0" spc="0"/>
+            <a:endParaRPr lang="en-US" sz="1750" dirty="0" spc="0"/>
           </a:p>
         </p:txBody>
       </p:sp>
@@ -2130,8 +2130,8 @@
         </p:nvSpPr>
         <p:spPr>
           <a:xfrm>
-            <a:off x="3337560" y="3040380"/>
-            <a:ext cx="982980" cy="419100"/>
+            <a:off x="3451860" y="3040380"/>
+            <a:ext cx="960120" cy="419100"/>
           </a:xfrm>
           <a:prstGeom prst="rect">
             <a:avLst/>
@@ -2153,7 +2153,7 @@
               <a:defRPr spc="0"/>
             </a:pPr>
             <a:r>
-              <a:rPr lang="en-US" sz="2000" b="1" dirty="0" spc="0">
+              <a:rPr lang="en-US" sz="1750" b="1" dirty="0" spc="0">
                 <a:solidFill>
                   <a:srgbClr val="112132"/>
                 </a:solidFill>
@@ -2163,7 +2163,7 @@
               </a:rPr>
               <a:t>詳細</a:t>
             </a:r>
-            <a:endParaRPr lang="en-US" sz="2000" dirty="0" spc="0"/>
+            <a:endParaRPr lang="en-US" sz="1750" dirty="0" spc="0"/>
           </a:p>
         </p:txBody>
       </p:sp>
@@ -2175,8 +2175,8 @@
         </p:nvSpPr>
         <p:spPr>
           <a:xfrm>
-            <a:off x="4472940" y="3040380"/>
-            <a:ext cx="982980" cy="419100"/>
+            <a:off x="4640580" y="3040380"/>
+            <a:ext cx="960120" cy="419100"/>
           </a:xfrm>
           <a:prstGeom prst="rect">
             <a:avLst/>
@@ -2198,7 +2198,7 @@
               <a:defRPr spc="0"/>
             </a:pPr>
             <a:r>
-              <a:rPr lang="en-US" sz="2000" b="1" dirty="0" spc="0">
+              <a:rPr lang="en-US" sz="1750" b="1" dirty="0" spc="0">
                 <a:solidFill>
                   <a:srgbClr val="112132"/>
                 </a:solidFill>
@@ -2208,7 +2208,7 @@
               </a:rPr>
               <a:t>日程</a:t>
             </a:r>
-            <a:endParaRPr lang="en-US" sz="2000" dirty="0" spc="0"/>
+            <a:endParaRPr lang="en-US" sz="1750" dirty="0" spc="0"/>
           </a:p>
         </p:txBody>
       </p:sp>
@@ -2220,8 +2220,8 @@
         </p:nvSpPr>
         <p:spPr>
           <a:xfrm>
-            <a:off x="5623560" y="3040380"/>
-            <a:ext cx="952500" cy="419100"/>
+            <a:off x="5829300" y="3040380"/>
+            <a:ext cx="960120" cy="419100"/>
           </a:xfrm>
           <a:prstGeom prst="rect">
             <a:avLst/>
@@ -2243,7 +2243,7 @@
               <a:defRPr spc="0"/>
             </a:pPr>
             <a:r>
-              <a:rPr lang="en-US" sz="2000" b="1" dirty="0" spc="0">
+              <a:rPr lang="en-US" sz="1750" b="1" dirty="0" spc="0">
                 <a:solidFill>
                   <a:srgbClr val="112132"/>
                 </a:solidFill>
@@ -2253,7 +2253,7 @@
               </a:rPr>
               <a:t>空席</a:t>
             </a:r>
-            <a:endParaRPr lang="en-US" sz="2000" dirty="0" spc="0"/>
+            <a:endParaRPr lang="en-US" sz="1750" dirty="0" spc="0"/>
           </a:p>
         </p:txBody>
       </p:sp>
@@ -2265,8 +2265,8 @@
         </p:nvSpPr>
         <p:spPr>
           <a:xfrm>
-            <a:off x="6774180" y="3040380"/>
-            <a:ext cx="1112520" cy="419100"/>
+            <a:off x="7018020" y="3040380"/>
+            <a:ext cx="960120" cy="419100"/>
           </a:xfrm>
           <a:prstGeom prst="rect">
             <a:avLst/>
@@ -2288,7 +2288,7 @@
               <a:defRPr spc="0"/>
             </a:pPr>
             <a:r>
-              <a:rPr lang="en-US" sz="2000" b="1" dirty="0" spc="0">
+              <a:rPr lang="en-US" sz="1750" b="1" dirty="0" spc="0">
                 <a:solidFill>
                   <a:srgbClr val="112132"/>
                 </a:solidFill>
@@ -2298,7 +2298,7 @@
               </a:rPr>
               <a:t>会員登録</a:t>
             </a:r>
-            <a:endParaRPr lang="en-US" sz="2000" dirty="0" spc="0"/>
+            <a:endParaRPr lang="en-US" sz="1750" dirty="0" spc="0"/>
           </a:p>
         </p:txBody>
       </p:sp>
@@ -2310,8 +2310,8 @@
         </p:nvSpPr>
         <p:spPr>
           <a:xfrm>
-            <a:off x="8199120" y="3040380"/>
-            <a:ext cx="1036320" cy="419100"/>
+            <a:off x="8206740" y="3040380"/>
+            <a:ext cx="960120" cy="419100"/>
           </a:xfrm>
           <a:prstGeom prst="rect">
             <a:avLst/>
@@ -2333,7 +2333,7 @@
               <a:defRPr spc="0"/>
             </a:pPr>
             <a:r>
-              <a:rPr lang="en-US" sz="2000" b="1" dirty="0" spc="0">
+              <a:rPr lang="en-US" sz="1750" b="1" dirty="0" spc="0">
                 <a:solidFill>
                   <a:srgbClr val="112132"/>
                 </a:solidFill>
@@ -2343,7 +2343,7 @@
               </a:rPr>
               <a:t>入力</a:t>
             </a:r>
-            <a:endParaRPr lang="en-US" sz="2000" dirty="0" spc="0"/>
+            <a:endParaRPr lang="en-US" sz="1750" dirty="0" spc="0"/>
           </a:p>
         </p:txBody>
       </p:sp>
@@ -2355,8 +2355,8 @@
         </p:nvSpPr>
         <p:spPr>
           <a:xfrm>
-            <a:off x="9456420" y="3040380"/>
-            <a:ext cx="929640" cy="419100"/>
+            <a:off x="9395460" y="3040380"/>
+            <a:ext cx="960120" cy="419100"/>
           </a:xfrm>
           <a:prstGeom prst="rect">
             <a:avLst/>
@@ -2378,7 +2378,7 @@
               <a:defRPr spc="0"/>
             </a:pPr>
             <a:r>
-              <a:rPr lang="en-US" sz="2000" b="1" dirty="0" spc="0">
+              <a:rPr lang="en-US" sz="1750" b="1" dirty="0" spc="0">
                 <a:solidFill>
                   <a:srgbClr val="112132"/>
                 </a:solidFill>
@@ -2388,7 +2388,7 @@
               </a:rPr>
               <a:t>確認</a:t>
             </a:r>
-            <a:endParaRPr lang="en-US" sz="2000" dirty="0" spc="0"/>
+            <a:endParaRPr lang="en-US" sz="1750" dirty="0" spc="0"/>
           </a:p>
         </p:txBody>
       </p:sp>
@@ -2400,8 +2400,8 @@
         </p:nvSpPr>
         <p:spPr>
           <a:xfrm>
-            <a:off x="10690860" y="3040380"/>
-            <a:ext cx="952500" cy="419100"/>
+            <a:off x="10584180" y="3040380"/>
+            <a:ext cx="960120" cy="419100"/>
           </a:xfrm>
           <a:prstGeom prst="rect">
             <a:avLst/>
@@ -2423,7 +2423,7 @@
               <a:defRPr spc="0"/>
             </a:pPr>
             <a:r>
-              <a:rPr lang="en-US" sz="2000" b="1" dirty="0" spc="0">
+              <a:rPr lang="en-US" sz="1750" b="1" dirty="0" spc="0">
                 <a:solidFill>
                   <a:srgbClr val="112132"/>
                 </a:solidFill>
@@ -2433,7 +2433,7 @@
               </a:rPr>
               <a:t>完了</a:t>
             </a:r>
-            <a:endParaRPr lang="en-US" sz="2000" dirty="0" spc="0"/>
+            <a:endParaRPr lang="en-US" sz="1750" dirty="0" spc="0"/>
           </a:p>
         </p:txBody>
       </p:sp>
@@ -4102,8 +4102,8 @@
         </p:nvSpPr>
         <p:spPr>
           <a:xfrm>
-            <a:off x="754380" y="2095500"/>
-            <a:ext cx="1165860" cy="1440180"/>
+            <a:off x="647700" y="2171700"/>
+            <a:ext cx="3223260" cy="1447800"/>
           </a:xfrm>
           <a:prstGeom prst="rect">
             <a:avLst/>
@@ -4117,7 +4117,7 @@
           </a:bodyPr>
           <a:lstStyle/>
           <a:p>
-            <a:pPr algn="l" indent="0" marL="0">
+            <a:pPr algn="ctr" indent="0" marL="0">
               <a:lnSpc>
                 <a:spcPct val="105000"/>
               </a:lnSpc>
@@ -4125,52 +4125,7 @@
               <a:defRPr spc="0"/>
             </a:pPr>
             <a:r>
-              <a:rPr lang="en-US" sz="10000" b="1" dirty="0" spc="0">
-                <a:solidFill>
-                  <a:srgbClr val="246AF1"/>
-                </a:solidFill>
-                <a:latin typeface="Manrope" pitchFamily="34" charset="0"/>
-                <a:ea typeface="Manrope" pitchFamily="34" charset="-122"/>
-                <a:cs typeface="Manrope" pitchFamily="34" charset="-120"/>
-              </a:rPr>
-              <a:t>4</a:t>
-            </a:r>
-            <a:endParaRPr lang="en-US" sz="10000" dirty="0" spc="0"/>
-          </a:p>
-        </p:txBody>
-      </p:sp>
-      <p:sp>
-        <p:nvSpPr>
-          <p:cNvPr id="11" name="metric-unit-0"/>
-          <p:cNvSpPr txBox="1"/>
-          <p:nvPr/>
-        </p:nvSpPr>
-        <p:spPr>
-          <a:xfrm>
-            <a:off x="1866900" y="2606040"/>
-            <a:ext cx="2072640" cy="906780"/>
-          </a:xfrm>
-          <a:prstGeom prst="rect">
-            <a:avLst/>
-          </a:prstGeom>
-          <a:noFill/>
-          <a:ln/>
-        </p:spPr>
-        <p:txBody>
-          <a:bodyPr wrap="square" lIns="15240" tIns="15240" rIns="15240" bIns="15240" rtlCol="0" anchor="t">
-            <a:noAutofit/>
-          </a:bodyPr>
-          <a:lstStyle/>
-          <a:p>
-            <a:pPr algn="l" indent="0" marL="0">
-              <a:lnSpc>
-                <a:spcPct val="105000"/>
-              </a:lnSpc>
-              <a:buNone/>
-              <a:defRPr spc="0"/>
-            </a:pPr>
-            <a:r>
-              <a:rPr lang="en-US" sz="6200" b="1" dirty="0" spc="0">
+              <a:rPr lang="en-US" sz="8700" b="1" dirty="0" spc="0">
                 <a:solidFill>
                   <a:srgbClr val="246AF1"/>
                 </a:solidFill>
@@ -4178,15 +4133,15 @@
                 <a:ea typeface="BIZ UDPGothic" pitchFamily="34" charset="-122"/>
                 <a:cs typeface="BIZ UDPGothic" pitchFamily="34" charset="-120"/>
               </a:rPr>
-              <a:t>操作</a:t>
-            </a:r>
-            <a:endParaRPr lang="en-US" sz="6200" dirty="0" spc="0"/>
-          </a:p>
-        </p:txBody>
-      </p:sp>
-      <p:sp>
-        <p:nvSpPr>
-          <p:cNvPr id="12" name="metric-label-0"/>
+              <a:t>4操作</a:t>
+            </a:r>
+            <a:endParaRPr lang="en-US" sz="8700" dirty="0" spc="0"/>
+          </a:p>
+        </p:txBody>
+      </p:sp>
+      <p:sp>
+        <p:nvSpPr>
+          <p:cNvPr id="11" name="metric-label-0"/>
           <p:cNvSpPr txBox="1"/>
           <p:nvPr/>
         </p:nvSpPr>
@@ -4231,14 +4186,14 @@
       </p:sp>
       <p:sp>
         <p:nvSpPr>
-          <p:cNvPr id="13" name="metric-1"/>
+          <p:cNvPr id="12" name="metric-1"/>
           <p:cNvSpPr txBox="1"/>
           <p:nvPr/>
         </p:nvSpPr>
         <p:spPr>
           <a:xfrm>
-            <a:off x="4716780" y="2095500"/>
-            <a:ext cx="2171700" cy="1440180"/>
+            <a:off x="4602480" y="2171700"/>
+            <a:ext cx="2941320" cy="1447800"/>
           </a:xfrm>
           <a:prstGeom prst="rect">
             <a:avLst/>
@@ -4252,7 +4207,7 @@
           </a:bodyPr>
           <a:lstStyle/>
           <a:p>
-            <a:pPr algn="l" indent="0" marL="0">
+            <a:pPr algn="ctr" indent="0" marL="0">
               <a:lnSpc>
                 <a:spcPct val="105000"/>
               </a:lnSpc>
@@ -4260,68 +4215,23 @@
               <a:defRPr spc="0"/>
             </a:pPr>
             <a:r>
-              <a:rPr lang="en-US" sz="10000" b="1" dirty="0" spc="0">
+              <a:rPr lang="en-US" sz="8700" b="1" dirty="0" spc="0">
                 <a:solidFill>
                   <a:srgbClr val="246AF1"/>
                 </a:solidFill>
-                <a:latin typeface="Manrope" pitchFamily="34" charset="0"/>
-                <a:ea typeface="Manrope" pitchFamily="34" charset="-122"/>
-                <a:cs typeface="Manrope" pitchFamily="34" charset="-120"/>
+                <a:latin typeface="BIZ UDPGothic" pitchFamily="34" charset="0"/>
+                <a:ea typeface="BIZ UDPGothic" pitchFamily="34" charset="-122"/>
+                <a:cs typeface="BIZ UDPGothic" pitchFamily="34" charset="-120"/>
               </a:rPr>
-              <a:t>90</a:t>
-            </a:r>
-            <a:endParaRPr lang="en-US" sz="10000" dirty="0" spc="0"/>
-          </a:p>
-        </p:txBody>
-      </p:sp>
-      <p:sp>
-        <p:nvSpPr>
-          <p:cNvPr id="14" name="metric-unit-1"/>
-          <p:cNvSpPr txBox="1"/>
-          <p:nvPr/>
-        </p:nvSpPr>
-        <p:spPr>
-          <a:xfrm>
-            <a:off x="6827520" y="2606040"/>
-            <a:ext cx="777240" cy="906780"/>
-          </a:xfrm>
-          <a:prstGeom prst="rect">
-            <a:avLst/>
-          </a:prstGeom>
-          <a:noFill/>
-          <a:ln/>
-        </p:spPr>
-        <p:txBody>
-          <a:bodyPr wrap="square" lIns="15240" tIns="15240" rIns="15240" bIns="15240" rtlCol="0" anchor="t">
-            <a:noAutofit/>
-          </a:bodyPr>
-          <a:lstStyle/>
-          <a:p>
-            <a:pPr algn="l" indent="0" marL="0">
-              <a:lnSpc>
-                <a:spcPct val="105000"/>
-              </a:lnSpc>
-              <a:buNone/>
-              <a:defRPr spc="0"/>
-            </a:pPr>
-            <a:r>
-              <a:rPr lang="en-US" sz="6200" b="1" dirty="0" spc="0">
-                <a:solidFill>
-                  <a:srgbClr val="246AF1"/>
-                </a:solidFill>
-                <a:latin typeface="Manrope" pitchFamily="34" charset="0"/>
-                <a:ea typeface="Manrope" pitchFamily="34" charset="-122"/>
-                <a:cs typeface="Manrope" pitchFamily="34" charset="-120"/>
-              </a:rPr>
-              <a:t>%</a:t>
-            </a:r>
-            <a:endParaRPr lang="en-US" sz="6200" dirty="0" spc="0"/>
-          </a:p>
-        </p:txBody>
-      </p:sp>
-      <p:sp>
-        <p:nvSpPr>
-          <p:cNvPr id="15" name="metric-label-1"/>
+              <a:t>90%</a:t>
+            </a:r>
+            <a:endParaRPr lang="en-US" sz="8700" dirty="0" spc="0"/>
+          </a:p>
+        </p:txBody>
+      </p:sp>
+      <p:sp>
+        <p:nvSpPr>
+          <p:cNvPr id="13" name="metric-label-1"/>
           <p:cNvSpPr txBox="1"/>
           <p:nvPr/>
         </p:nvSpPr>
@@ -4366,14 +4276,14 @@
       </p:sp>
       <p:sp>
         <p:nvSpPr>
-          <p:cNvPr id="16" name="metric-2"/>
+          <p:cNvPr id="14" name="metric-2"/>
           <p:cNvSpPr txBox="1"/>
           <p:nvPr/>
         </p:nvSpPr>
         <p:spPr>
           <a:xfrm>
-            <a:off x="8610600" y="2095500"/>
-            <a:ext cx="2171700" cy="1440180"/>
+            <a:off x="8503920" y="2171700"/>
+            <a:ext cx="3124200" cy="1447800"/>
           </a:xfrm>
           <a:prstGeom prst="rect">
             <a:avLst/>
@@ -4387,7 +4297,7 @@
           </a:bodyPr>
           <a:lstStyle/>
           <a:p>
-            <a:pPr algn="l" indent="0" marL="0">
+            <a:pPr algn="ctr" indent="0" marL="0">
               <a:lnSpc>
                 <a:spcPct val="105000"/>
               </a:lnSpc>
@@ -4395,52 +4305,7 @@
               <a:defRPr spc="0"/>
             </a:pPr>
             <a:r>
-              <a:rPr lang="en-US" sz="10000" b="1" dirty="0" spc="0">
-                <a:solidFill>
-                  <a:srgbClr val="246AF1"/>
-                </a:solidFill>
-                <a:latin typeface="Manrope" pitchFamily="34" charset="0"/>
-                <a:ea typeface="Manrope" pitchFamily="34" charset="-122"/>
-                <a:cs typeface="Manrope" pitchFamily="34" charset="-120"/>
-              </a:rPr>
-              <a:t>60</a:t>
-            </a:r>
-            <a:endParaRPr lang="en-US" sz="10000" dirty="0" spc="0"/>
-          </a:p>
-        </p:txBody>
-      </p:sp>
-      <p:sp>
-        <p:nvSpPr>
-          <p:cNvPr id="17" name="metric-unit-2"/>
-          <p:cNvSpPr txBox="1"/>
-          <p:nvPr/>
-        </p:nvSpPr>
-        <p:spPr>
-          <a:xfrm>
-            <a:off x="10728960" y="2606040"/>
-            <a:ext cx="967740" cy="906780"/>
-          </a:xfrm>
-          <a:prstGeom prst="rect">
-            <a:avLst/>
-          </a:prstGeom>
-          <a:noFill/>
-          <a:ln/>
-        </p:spPr>
-        <p:txBody>
-          <a:bodyPr wrap="square" lIns="15240" tIns="15240" rIns="15240" bIns="15240" rtlCol="0" anchor="t">
-            <a:noAutofit/>
-          </a:bodyPr>
-          <a:lstStyle/>
-          <a:p>
-            <a:pPr algn="l" indent="0" marL="0">
-              <a:lnSpc>
-                <a:spcPct val="105000"/>
-              </a:lnSpc>
-              <a:buNone/>
-              <a:defRPr spc="0"/>
-            </a:pPr>
-            <a:r>
-              <a:rPr lang="en-US" sz="6200" b="1" dirty="0" spc="0">
+              <a:rPr lang="en-US" sz="8700" b="1" dirty="0" spc="0">
                 <a:solidFill>
                   <a:srgbClr val="246AF1"/>
                 </a:solidFill>
@@ -4448,15 +4313,15 @@
                 <a:ea typeface="BIZ UDPGothic" pitchFamily="34" charset="-122"/>
                 <a:cs typeface="BIZ UDPGothic" pitchFamily="34" charset="-120"/>
               </a:rPr>
-              <a:t>秒</a:t>
-            </a:r>
-            <a:endParaRPr lang="en-US" sz="6200" dirty="0" spc="0"/>
-          </a:p>
-        </p:txBody>
-      </p:sp>
-      <p:sp>
-        <p:nvSpPr>
-          <p:cNvPr id="18" name="metric-label-2"/>
+              <a:t>60秒</a:t>
+            </a:r>
+            <a:endParaRPr lang="en-US" sz="8700" dirty="0" spc="0"/>
+          </a:p>
+        </p:txBody>
+      </p:sp>
+      <p:sp>
+        <p:nvSpPr>
+          <p:cNvPr id="15" name="metric-label-2"/>
           <p:cNvSpPr txBox="1"/>
           <p:nvPr/>
         </p:nvSpPr>
@@ -4501,7 +4366,7 @@
       </p:sp>
       <p:sp>
         <p:nvSpPr>
-          <p:cNvPr id="19" name="stage-number-0"/>
+          <p:cNvPr id="16" name="stage-number-0"/>
           <p:cNvSpPr txBox="1"/>
           <p:nvPr/>
         </p:nvSpPr>
@@ -4546,7 +4411,7 @@
       </p:sp>
       <p:sp>
         <p:nvSpPr>
-          <p:cNvPr id="20" name="stage-label-0"/>
+          <p:cNvPr id="17" name="stage-label-0"/>
           <p:cNvSpPr txBox="1"/>
           <p:nvPr/>
         </p:nvSpPr>
@@ -4591,7 +4456,7 @@
       </p:sp>
       <p:sp>
         <p:nvSpPr>
-          <p:cNvPr id="21" name="stage-number-1"/>
+          <p:cNvPr id="18" name="stage-number-1"/>
           <p:cNvSpPr txBox="1"/>
           <p:nvPr/>
         </p:nvSpPr>
@@ -4636,7 +4501,7 @@
       </p:sp>
       <p:sp>
         <p:nvSpPr>
-          <p:cNvPr id="22" name="stage-label-1"/>
+          <p:cNvPr id="19" name="stage-label-1"/>
           <p:cNvSpPr txBox="1"/>
           <p:nvPr/>
         </p:nvSpPr>
@@ -4681,7 +4546,7 @@
       </p:sp>
       <p:sp>
         <p:nvSpPr>
-          <p:cNvPr id="23" name="stage-number-2"/>
+          <p:cNvPr id="20" name="stage-number-2"/>
           <p:cNvSpPr txBox="1"/>
           <p:nvPr/>
         </p:nvSpPr>
@@ -4726,7 +4591,7 @@
       </p:sp>
       <p:sp>
         <p:nvSpPr>
-          <p:cNvPr id="24" name="stage-label-2"/>
+          <p:cNvPr id="21" name="stage-label-2"/>
           <p:cNvSpPr txBox="1"/>
           <p:nvPr/>
         </p:nvSpPr>
@@ -4771,7 +4636,7 @@
       </p:sp>
       <p:sp>
         <p:nvSpPr>
-          <p:cNvPr id="25" name="qualification"/>
+          <p:cNvPr id="22" name="qualification"/>
           <p:cNvSpPr txBox="1"/>
           <p:nvPr/>
         </p:nvSpPr>
